--- a/docs/演示材料.pptx
+++ b/docs/演示材料.pptx
@@ -3905,7 +3905,7 @@
                 </a:solidFill>
                 <a:latin typeface="微软雅黑"/>
               </a:rPr>
-              <a:t>· 全流程一条命令复现：python scripts/run_all.py --config configs/local.yaml</a:t>
+              <a:t>· 全流程一条命令复现：python scripts/run_all.py --config configs/base.yaml</a:t>
             </a:r>
           </a:p>
         </p:txBody>
